--- a/mvccc_master_modern_dark.pptx
+++ b/mvccc_master_modern_dark.pptx
@@ -4258,7 +4258,7 @@
         <a:srgbClr val="0B0F14"/>
       </a:lt1>
       <a:dk2>
-        <a:srgbClr val="A7A7A7"/>
+        <a:srgbClr val="F6C453"/>
       </a:dk2>
       <a:lt2>
         <a:srgbClr val="535353"/>
@@ -5312,7 +5312,7 @@
         <a:srgbClr val="FFFFFF"/>
       </a:lt1>
       <a:dk2>
-        <a:srgbClr val="A7A7A7"/>
+        <a:srgbClr val="F6C453"/>
       </a:dk2>
       <a:lt2>
         <a:srgbClr val="535353"/>

--- a/mvccc_master_modern_dark.pptx
+++ b/mvccc_master_modern_dark.pptx
@@ -621,8 +621,8 @@
         </p:nvSpPr>
         <p:spPr>
           <a:xfrm>
-            <a:off x="406400" y="589901"/>
-            <a:ext cx="11379200" cy="5678198"/>
+            <a:off x="406400" y="914400"/>
+            <a:ext cx="11379200" cy="5353699"/>
           </a:xfrm>
           <a:prstGeom prst="rect">
             <a:avLst/>
@@ -632,7 +632,7 @@
           <a:bodyPr/>
           <a:lstStyle>
             <a:lvl1pPr algn="ctr">
-              <a:defRPr sz="7200"/>
+              <a:defRPr sz="7600"/>
             </a:lvl1pPr>
           </a:lstStyle>
           <a:p>

--- a/mvccc_master_modern_dark.pptx
+++ b/mvccc_master_modern_dark.pptx
@@ -1039,7 +1039,7 @@
           <ns1:bodyPr/>
           <ns1:lstStyle>
             <ns1:lvl1pPr>
-              <ns1:defRPr b="1" sz="5200">
+              <ns1:defRPr b="1" sz="6000">
                 <ns1:latin typeface="Helvetica Neue"/>
                 <ns1:ea typeface="Helvetica Neue"/>
                 <ns1:cs typeface="Helvetica Neue"/>
@@ -1076,7 +1076,7 @@
           <ns1:bodyPr/>
           <ns1:lstStyle>
             <ns1:lvl1pPr algn="ctr">
-              <ns1:defRPr sz="4000">
+              <ns1:defRPr sz="4800">
                 <ns1:latin typeface="Helvetica Neue"/>
                 <ns1:ea typeface="Helvetica Neue"/>
                 <ns1:cs typeface="Helvetica Neue"/>

--- a/mvccc_master_modern_dark.pptx
+++ b/mvccc_master_modern_dark.pptx
@@ -1335,7 +1335,7 @@
         <p:spPr>
           <a:xfrm>
             <a:off x="1158086" y="1800000"/>
-            <a:ext cx="9875521" cy="3200000"/>
+            <a:ext cx="9875521" cy="1200000"/>
           </a:xfrm>
           <a:prstGeom prst="rect">
             <a:avLst/>

--- a/mvccc_master_modern_dark.pptx
+++ b/mvccc_master_modern_dark.pptx
@@ -1335,7 +1335,7 @@
         <p:spPr>
           <a:xfrm>
             <a:off x="1158086" y="1800000"/>
-            <a:ext cx="9875521" cy="1200000"/>
+            <a:ext cx="9875521" cy="2438400"/>
           </a:xfrm>
           <a:prstGeom prst="rect">
             <a:avLst/>
